--- a/천문_자동화모듈_안내.pptx
+++ b/천문_자동화모듈_안내.pptx
@@ -2306,79 +2306,9 @@
           </a:p>
         </p:txBody>
       </p:sp>
-      <p:pic>
-        <p:nvPicPr>
-          <p:cNvPr id="10" name="Image 0" descr="screenshots/u_terminal.png">    </p:cNvPr>
-          <p:cNvPicPr>
-            <a:picLocks noChangeAspect="1"/>
-          </p:cNvPicPr>
-          <p:nvPr/>
-        </p:nvPicPr>
-        <p:blipFill>
-          <a:blip r:embed="rId1"/>
-          <a:stretch>
-            <a:fillRect/>
-          </a:stretch>
-        </p:blipFill>
-        <p:spPr>
-          <a:xfrm>
-            <a:off x="7315200" y="4023360"/>
-            <a:ext cx="4297680" cy="1498771"/>
-          </a:xfrm>
-          <a:prstGeom prst="rect">
-            <a:avLst/>
-          </a:prstGeom>
-          <a:effectLst>
-            <a:outerShdw sx="100000" sy="100000" kx="0" ky="0" algn="bl" rotWithShape="0" blurRad="76200" dist="25400" dir="5400000">
-              <a:srgbClr val="9AA3B2">
-                <a:alpha val="40000"/>
-              </a:srgbClr>
-            </a:outerShdw>
-          </a:effectLst>
-        </p:spPr>
-      </p:pic>
-      <p:sp>
-        <p:nvSpPr>
-          <p:cNvPr id="11" name="Text 8"/>
-          <p:cNvSpPr/>
-          <p:nvPr/>
-        </p:nvSpPr>
-        <p:spPr>
-          <a:xfrm>
-            <a:off x="7315200" y="5567851"/>
-            <a:ext cx="4297680" cy="0"/>
-          </a:xfrm>
-          <a:prstGeom prst="rect">
-            <a:avLst/>
-          </a:prstGeom>
-          <a:noFill/>
-          <a:ln/>
-        </p:spPr>
-        <p:txBody>
-          <a:bodyPr wrap="square" rtlCol="0" anchor="ctr"/>
-          <a:lstStyle/>
-          <a:p>
-            <a:pPr algn="ctr" indent="0" marL="0">
-              <a:buNone/>
-            </a:pPr>
-            <a:r>
-              <a:rPr lang="en-US" sz="1000" dirty="0">
-                <a:solidFill>
-                  <a:srgbClr val="5A5A6E"/>
-                </a:solidFill>
-                <a:latin typeface="Malgun Gothic" pitchFamily="34" charset="0"/>
-                <a:ea typeface="Malgun Gothic" pitchFamily="34" charset="-122"/>
-                <a:cs typeface="Malgun Gothic" pitchFamily="34" charset="-120"/>
-              </a:rPr>
-              <a:t>실제 생성 로그 — “생성 완료”</a:t>
-            </a:r>
-            <a:endParaRPr lang="en-US" sz="1000" dirty="0"/>
-          </a:p>
-        </p:txBody>
-      </p:sp>
-      <p:sp>
-        <p:nvSpPr>
-          <p:cNvPr id="12" name="Shape 9"/>
+      <p:sp>
+        <p:nvSpPr>
+          <p:cNvPr id="10" name="Shape 8"/>
           <p:cNvSpPr/>
           <p:nvPr/>
         </p:nvSpPr>
@@ -2401,7 +2331,7 @@
       </p:sp>
       <p:sp>
         <p:nvSpPr>
-          <p:cNvPr id="13" name="Text 10"/>
+          <p:cNvPr id="11" name="Text 9"/>
           <p:cNvSpPr/>
           <p:nvPr/>
         </p:nvSpPr>
@@ -2440,7 +2370,7 @@
       </p:sp>
       <p:sp>
         <p:nvSpPr>
-          <p:cNvPr id="14" name="Text 11"/>
+          <p:cNvPr id="12" name="Text 10"/>
           <p:cNvSpPr/>
           <p:nvPr/>
         </p:nvSpPr>
